--- a/Unit 4/Tab_Navigation_Updated.pptx
+++ b/Unit 4/Tab_Navigation_Updated.pptx
@@ -227,7 +227,7 @@
           <a:p>
             <a:fld id="{AC356047-9B32-4B44-A900-2428BFBDDF8F}" type="datetimeFigureOut">
               <a:rPr lang="en-US" smtClean="0"/>
-              <a:t>8/30/2026</a:t>
+              <a:t>9/15/2026</a:t>
             </a:fld>
             <a:endParaRPr lang="en-US"/>
           </a:p>
@@ -1619,7 +1619,7 @@
           <a:bodyPr/>
           <a:lstStyle/>
           <a:p>
-            <a:pPr marL="171450" lvl="0" indent="-171450" fontAlgn="t">
+            <a:pPr marL="628650" lvl="1" indent="-171450">
               <a:buFont typeface="Arial" panose="020B0604020202020204" pitchFamily="34" charset="0"/>
               <a:buChar char="•"/>
             </a:pPr>
@@ -2287,7 +2287,7 @@
           <a:p>
             <a:fld id="{5BCAD085-E8A6-8845-BD4E-CB4CCA059FC4}" type="datetimeFigureOut">
               <a:rPr lang="en-US" smtClean="0"/>
-              <a:t>8/30/2026</a:t>
+              <a:t>9/15/2026</a:t>
             </a:fld>
             <a:endParaRPr lang="en-US"/>
           </a:p>
@@ -2455,7 +2455,7 @@
           <a:p>
             <a:fld id="{5BCAD085-E8A6-8845-BD4E-CB4CCA059FC4}" type="datetimeFigureOut">
               <a:rPr lang="en-US" smtClean="0"/>
-              <a:t>8/30/2026</a:t>
+              <a:t>9/15/2026</a:t>
             </a:fld>
             <a:endParaRPr lang="en-US"/>
           </a:p>
@@ -2633,7 +2633,7 @@
           <a:p>
             <a:fld id="{5BCAD085-E8A6-8845-BD4E-CB4CCA059FC4}" type="datetimeFigureOut">
               <a:rPr lang="en-US" smtClean="0"/>
-              <a:t>8/30/2026</a:t>
+              <a:t>9/15/2026</a:t>
             </a:fld>
             <a:endParaRPr lang="en-US"/>
           </a:p>
@@ -2801,7 +2801,7 @@
           <a:p>
             <a:fld id="{5BCAD085-E8A6-8845-BD4E-CB4CCA059FC4}" type="datetimeFigureOut">
               <a:rPr lang="en-US" smtClean="0"/>
-              <a:t>8/30/2026</a:t>
+              <a:t>9/15/2026</a:t>
             </a:fld>
             <a:endParaRPr lang="en-US"/>
           </a:p>
@@ -3046,7 +3046,7 @@
           <a:p>
             <a:fld id="{5BCAD085-E8A6-8845-BD4E-CB4CCA059FC4}" type="datetimeFigureOut">
               <a:rPr lang="en-US" smtClean="0"/>
-              <a:t>8/30/2026</a:t>
+              <a:t>9/15/2026</a:t>
             </a:fld>
             <a:endParaRPr lang="en-US"/>
           </a:p>
@@ -3331,7 +3331,7 @@
           <a:p>
             <a:fld id="{5BCAD085-E8A6-8845-BD4E-CB4CCA059FC4}" type="datetimeFigureOut">
               <a:rPr lang="en-US" smtClean="0"/>
-              <a:t>8/30/2026</a:t>
+              <a:t>9/15/2026</a:t>
             </a:fld>
             <a:endParaRPr lang="en-US"/>
           </a:p>
@@ -3750,7 +3750,7 @@
           <a:p>
             <a:fld id="{5BCAD085-E8A6-8845-BD4E-CB4CCA059FC4}" type="datetimeFigureOut">
               <a:rPr lang="en-US" smtClean="0"/>
-              <a:t>8/30/2026</a:t>
+              <a:t>9/15/2026</a:t>
             </a:fld>
             <a:endParaRPr lang="en-US"/>
           </a:p>
@@ -3867,7 +3867,7 @@
           <a:p>
             <a:fld id="{5BCAD085-E8A6-8845-BD4E-CB4CCA059FC4}" type="datetimeFigureOut">
               <a:rPr lang="en-US" smtClean="0"/>
-              <a:t>8/30/2026</a:t>
+              <a:t>9/15/2026</a:t>
             </a:fld>
             <a:endParaRPr lang="en-US"/>
           </a:p>
@@ -3962,7 +3962,7 @@
           <a:p>
             <a:fld id="{5BCAD085-E8A6-8845-BD4E-CB4CCA059FC4}" type="datetimeFigureOut">
               <a:rPr lang="en-US" smtClean="0"/>
-              <a:t>8/30/2026</a:t>
+              <a:t>9/15/2026</a:t>
             </a:fld>
             <a:endParaRPr lang="en-US"/>
           </a:p>
@@ -4237,7 +4237,7 @@
           <a:p>
             <a:fld id="{5BCAD085-E8A6-8845-BD4E-CB4CCA059FC4}" type="datetimeFigureOut">
               <a:rPr lang="en-US" smtClean="0"/>
-              <a:t>8/30/2026</a:t>
+              <a:t>9/15/2026</a:t>
             </a:fld>
             <a:endParaRPr lang="en-US"/>
           </a:p>
@@ -4489,7 +4489,7 @@
           <a:p>
             <a:fld id="{5BCAD085-E8A6-8845-BD4E-CB4CCA059FC4}" type="datetimeFigureOut">
               <a:rPr lang="en-US" smtClean="0"/>
-              <a:t>8/30/2026</a:t>
+              <a:t>9/15/2026</a:t>
             </a:fld>
             <a:endParaRPr lang="en-US"/>
           </a:p>
@@ -4700,7 +4700,7 @@
           <a:p>
             <a:fld id="{5BCAD085-E8A6-8845-BD4E-CB4CCA059FC4}" type="datetimeFigureOut">
               <a:rPr lang="en-US" smtClean="0"/>
-              <a:t>8/30/2026</a:t>
+              <a:t>9/15/2026</a:t>
             </a:fld>
             <a:endParaRPr lang="en-US"/>
           </a:p>
@@ -12756,7 +12756,7 @@
         <p:spPr>
           <a:xfrm>
             <a:off x="365760" y="28975"/>
-            <a:ext cx="7634654" cy="523220"/>
+            <a:ext cx="6810711" cy="523220"/>
           </a:xfrm>
           <a:prstGeom prst="rect">
             <a:avLst/>
@@ -12777,7 +12777,7 @@
                 </a:solidFill>
                 <a:latin typeface="Calibri"/>
               </a:rPr>
-              <a:t>Class Activity — Build a 4-Tab Fitness Tracker Shell</a:t>
+              <a:t>Activity — Build a 4-Tab Fitness Tracker Shell</a:t>
             </a:r>
           </a:p>
         </p:txBody>
@@ -12790,8 +12790,8 @@
         </p:nvSpPr>
         <p:spPr>
           <a:xfrm>
-            <a:off x="365761" y="641533"/>
-            <a:ext cx="8595360" cy="954107"/>
+            <a:off x="275129" y="641533"/>
+            <a:ext cx="8839740" cy="954107"/>
           </a:xfrm>
           <a:prstGeom prst="rect">
             <a:avLst/>
@@ -12809,13 +12809,67 @@
               <a:buChar char="•"/>
             </a:pPr>
             <a:r>
+              <a:rPr lang="en-US" dirty="0">
+                <a:solidFill>
+                  <a:schemeClr val="bg1"/>
+                </a:solidFill>
+                <a:latin typeface="Calibri"/>
+              </a:rPr>
+              <a:t>Go to Unit resources and o</a:t>
+            </a:r>
+            <a:r>
               <a:rPr dirty="0">
                 <a:solidFill>
                   <a:schemeClr val="bg1"/>
                 </a:solidFill>
                 <a:latin typeface="Calibri"/>
               </a:rPr>
-              <a:t>30 minutes  ·  Open Day1_Activity.md for full instructions</a:t>
+              <a:t>pen </a:t>
+            </a:r>
+            <a:r>
+              <a:rPr lang="en-US" dirty="0" err="1">
+                <a:solidFill>
+                  <a:schemeClr val="bg1"/>
+                </a:solidFill>
+                <a:latin typeface="Calibri"/>
+              </a:rPr>
+              <a:t>Tabs_Fitness_Tracker_</a:t>
+            </a:r>
+            <a:r>
+              <a:rPr dirty="0" err="1">
+                <a:solidFill>
+                  <a:schemeClr val="bg1"/>
+                </a:solidFill>
+                <a:latin typeface="Calibri"/>
+              </a:rPr>
+              <a:t>Activity</a:t>
+            </a:r>
+            <a:r>
+              <a:rPr lang="en-US" dirty="0" err="1">
+                <a:solidFill>
+                  <a:schemeClr val="bg1"/>
+                </a:solidFill>
+                <a:latin typeface="Calibri"/>
+              </a:rPr>
+              <a:t>_Guide</a:t>
+            </a:r>
+            <a:r>
+              <a:rPr lang="en-US" dirty="0">
+                <a:solidFill>
+                  <a:schemeClr val="bg1"/>
+                </a:solidFill>
+                <a:latin typeface="Calibri"/>
+              </a:rPr>
+              <a:t> for full instr</a:t>
+            </a:r>
+            <a:r>
+              <a:rPr dirty="0">
+                <a:solidFill>
+                  <a:schemeClr val="bg1"/>
+                </a:solidFill>
+                <a:latin typeface="Calibri"/>
+              </a:rPr>
+              <a:t>uctions</a:t>
             </a:r>
             <a:endParaRPr lang="en-US" dirty="0">
               <a:solidFill>
@@ -16857,67 +16911,147 @@
           </a:bodyPr>
           <a:lstStyle/>
           <a:p>
-            <a:pPr>
+            <a:pPr marL="171450" indent="-171450">
               <a:lnSpc>
                 <a:spcPct val="115000"/>
               </a:lnSpc>
-            </a:pPr>
-            <a:r>
-              <a:rPr sz="1200">
+              <a:buFont typeface="Arial" panose="020B0604020202020204" pitchFamily="34" charset="0"/>
+              <a:buChar char="•"/>
+            </a:pPr>
+            <a:r>
+              <a:rPr sz="1200" dirty="0">
                 <a:solidFill>
                   <a:srgbClr val="334155"/>
                 </a:solidFill>
                 <a:latin typeface="Calibri"/>
               </a:rPr>
-              <a:t>Every .tsx in app/ becomes a URL.</a:t>
-            </a:r>
-          </a:p>
-          <a:p>
-            <a:pPr>
+              <a:t>Every .</a:t>
+            </a:r>
+            <a:r>
+              <a:rPr sz="1200" dirty="0" err="1">
+                <a:solidFill>
+                  <a:srgbClr val="334155"/>
+                </a:solidFill>
+                <a:latin typeface="Calibri"/>
+              </a:rPr>
+              <a:t>tsx</a:t>
+            </a:r>
+            <a:r>
+              <a:rPr sz="1200" dirty="0">
+                <a:solidFill>
+                  <a:srgbClr val="334155"/>
+                </a:solidFill>
+                <a:latin typeface="Calibri"/>
+              </a:rPr>
+              <a:t> in app/ becomes a URL.</a:t>
+            </a:r>
+          </a:p>
+          <a:p>
+            <a:pPr marL="171450" indent="-171450">
               <a:lnSpc>
                 <a:spcPct val="115000"/>
               </a:lnSpc>
-            </a:pPr>
-            <a:r>
-              <a:rPr sz="1200">
+              <a:buFont typeface="Arial" panose="020B0604020202020204" pitchFamily="34" charset="0"/>
+              <a:buChar char="•"/>
+            </a:pPr>
+            <a:r>
+              <a:rPr sz="1200" dirty="0">
                 <a:solidFill>
                   <a:srgbClr val="334155"/>
                 </a:solidFill>
                 <a:latin typeface="Calibri"/>
               </a:rPr>
-              <a:t>app/index.tsx     →   /</a:t>
-            </a:r>
-          </a:p>
-          <a:p>
-            <a:pPr>
+              <a:t>app/</a:t>
+            </a:r>
+            <a:r>
+              <a:rPr sz="1200" dirty="0" err="1">
+                <a:solidFill>
+                  <a:srgbClr val="334155"/>
+                </a:solidFill>
+                <a:latin typeface="Calibri"/>
+              </a:rPr>
+              <a:t>index.tsx</a:t>
+            </a:r>
+            <a:r>
+              <a:rPr sz="1200" dirty="0">
+                <a:solidFill>
+                  <a:srgbClr val="334155"/>
+                </a:solidFill>
+                <a:latin typeface="Calibri"/>
+              </a:rPr>
+              <a:t>     →   /</a:t>
+            </a:r>
+          </a:p>
+          <a:p>
+            <a:pPr marL="171450" indent="-171450">
               <a:lnSpc>
                 <a:spcPct val="115000"/>
               </a:lnSpc>
-            </a:pPr>
-            <a:r>
-              <a:rPr sz="1200">
+              <a:buFont typeface="Arial" panose="020B0604020202020204" pitchFamily="34" charset="0"/>
+              <a:buChar char="•"/>
+            </a:pPr>
+            <a:r>
+              <a:rPr sz="1200" dirty="0">
                 <a:solidFill>
                   <a:srgbClr val="334155"/>
                 </a:solidFill>
                 <a:latin typeface="Calibri"/>
               </a:rPr>
-              <a:t>app/profile.tsx   →   /profile</a:t>
-            </a:r>
-          </a:p>
-          <a:p>
-            <a:pPr>
+              <a:t>app/</a:t>
+            </a:r>
+            <a:r>
+              <a:rPr sz="1200" dirty="0" err="1">
+                <a:solidFill>
+                  <a:srgbClr val="334155"/>
+                </a:solidFill>
+                <a:latin typeface="Calibri"/>
+              </a:rPr>
+              <a:t>profile.tsx</a:t>
+            </a:r>
+            <a:r>
+              <a:rPr sz="1200" dirty="0">
+                <a:solidFill>
+                  <a:srgbClr val="334155"/>
+                </a:solidFill>
+                <a:latin typeface="Calibri"/>
+              </a:rPr>
+              <a:t>   →   /profile</a:t>
+            </a:r>
+          </a:p>
+          <a:p>
+            <a:pPr marL="171450" indent="-171450">
               <a:lnSpc>
                 <a:spcPct val="115000"/>
               </a:lnSpc>
-            </a:pPr>
-            <a:r>
-              <a:rPr sz="1200">
+              <a:buFont typeface="Arial" panose="020B0604020202020204" pitchFamily="34" charset="0"/>
+              <a:buChar char="•"/>
+            </a:pPr>
+            <a:r>
+              <a:rPr sz="1200" dirty="0">
                 <a:solidFill>
                   <a:srgbClr val="334155"/>
                 </a:solidFill>
                 <a:latin typeface="Calibri"/>
               </a:rPr>
-              <a:t>app/_layout.tsx is the parent shell.</a:t>
+              <a:t>app/_</a:t>
+            </a:r>
+            <a:r>
+              <a:rPr sz="1200" dirty="0" err="1">
+                <a:solidFill>
+                  <a:srgbClr val="334155"/>
+                </a:solidFill>
+                <a:latin typeface="Calibri"/>
+              </a:rPr>
+              <a:t>layout.tsx</a:t>
+            </a:r>
+            <a:r>
+              <a:rPr sz="1200" dirty="0">
+                <a:solidFill>
+                  <a:srgbClr val="334155"/>
+                </a:solidFill>
+                <a:latin typeface="Calibri"/>
+              </a:rPr>
+              <a:t> is the parent shell.</a:t>
             </a:r>
           </a:p>
         </p:txBody>
@@ -17010,8 +17144,8 @@
         </p:nvSpPr>
         <p:spPr>
           <a:xfrm>
-            <a:off x="3410712" y="1655064"/>
-            <a:ext cx="2569464" cy="883190"/>
+            <a:off x="3341444" y="1655064"/>
+            <a:ext cx="2679192" cy="883190"/>
           </a:xfrm>
           <a:prstGeom prst="rect">
             <a:avLst/>
@@ -17024,10 +17158,12 @@
           </a:bodyPr>
           <a:lstStyle/>
           <a:p>
-            <a:pPr>
+            <a:pPr marL="171450" indent="-171450">
               <a:lnSpc>
                 <a:spcPct val="115000"/>
               </a:lnSpc>
+              <a:buFont typeface="Arial" panose="020B0604020202020204" pitchFamily="34" charset="0"/>
+              <a:buChar char="•"/>
             </a:pPr>
             <a:r>
               <a:rPr sz="1200" dirty="0">
@@ -17058,10 +17194,12 @@
             </a:r>
           </a:p>
           <a:p>
-            <a:pPr>
+            <a:pPr marL="171450" indent="-171450">
               <a:lnSpc>
                 <a:spcPct val="115000"/>
               </a:lnSpc>
+              <a:buFont typeface="Arial" panose="020B0604020202020204" pitchFamily="34" charset="0"/>
+              <a:buChar char="•"/>
             </a:pPr>
             <a:r>
               <a:rPr sz="1200" dirty="0" err="1">
@@ -17083,10 +17221,12 @@
             </a:r>
           </a:p>
           <a:p>
-            <a:pPr>
+            <a:pPr marL="171450" indent="-171450">
               <a:lnSpc>
                 <a:spcPct val="115000"/>
               </a:lnSpc>
+              <a:buFont typeface="Arial" panose="020B0604020202020204" pitchFamily="34" charset="0"/>
+              <a:buChar char="•"/>
             </a:pPr>
             <a:r>
               <a:rPr sz="1200" dirty="0" err="1">
@@ -17108,10 +17248,12 @@
             </a:r>
           </a:p>
           <a:p>
-            <a:pPr>
+            <a:pPr marL="171450" indent="-171450">
               <a:lnSpc>
                 <a:spcPct val="115000"/>
               </a:lnSpc>
+              <a:buFont typeface="Arial" panose="020B0604020202020204" pitchFamily="34" charset="0"/>
+              <a:buChar char="•"/>
             </a:pPr>
             <a:r>
               <a:rPr sz="1200" dirty="0">
@@ -17213,8 +17355,8 @@
         </p:nvSpPr>
         <p:spPr>
           <a:xfrm>
-            <a:off x="6291072" y="1655064"/>
-            <a:ext cx="2377440" cy="883190"/>
+            <a:off x="6150756" y="1622696"/>
+            <a:ext cx="2542032" cy="1095556"/>
           </a:xfrm>
           <a:prstGeom prst="rect">
             <a:avLst/>
@@ -17227,10 +17369,12 @@
           </a:bodyPr>
           <a:lstStyle/>
           <a:p>
-            <a:pPr>
+            <a:pPr marL="171450" indent="-171450">
               <a:lnSpc>
                 <a:spcPct val="115000"/>
               </a:lnSpc>
+              <a:buFont typeface="Arial" panose="020B0604020202020204" pitchFamily="34" charset="0"/>
+              <a:buChar char="•"/>
             </a:pPr>
             <a:r>
               <a:rPr sz="1200" dirty="0">
@@ -17243,10 +17387,12 @@
             </a:r>
           </a:p>
           <a:p>
-            <a:pPr>
+            <a:pPr marL="171450" indent="-171450">
               <a:lnSpc>
                 <a:spcPct val="115000"/>
               </a:lnSpc>
+              <a:buFont typeface="Arial" panose="020B0604020202020204" pitchFamily="34" charset="0"/>
+              <a:buChar char="•"/>
             </a:pPr>
             <a:r>
               <a:rPr sz="1200" dirty="0">
@@ -17259,10 +17405,12 @@
             </a:r>
           </a:p>
           <a:p>
-            <a:pPr>
+            <a:pPr marL="171450" indent="-171450">
               <a:lnSpc>
                 <a:spcPct val="115000"/>
               </a:lnSpc>
+              <a:buFont typeface="Arial" panose="020B0604020202020204" pitchFamily="34" charset="0"/>
+              <a:buChar char="•"/>
             </a:pPr>
             <a:r>
               <a:rPr sz="1200" dirty="0">
@@ -17275,10 +17423,12 @@
             </a:r>
           </a:p>
           <a:p>
-            <a:pPr>
+            <a:pPr marL="171450" indent="-171450">
               <a:lnSpc>
                 <a:spcPct val="115000"/>
               </a:lnSpc>
+              <a:buFont typeface="Arial" panose="020B0604020202020204" pitchFamily="34" charset="0"/>
+              <a:buChar char="•"/>
             </a:pPr>
             <a:r>
               <a:rPr sz="1200" dirty="0">
@@ -17462,13 +17612,15 @@
           </a:bodyPr>
           <a:lstStyle/>
           <a:p>
-            <a:pPr>
+            <a:pPr marL="285750" indent="-285750">
               <a:lnSpc>
                 <a:spcPct val="115000"/>
               </a:lnSpc>
-            </a:pPr>
-            <a:r>
-              <a:rPr sz="1400">
+              <a:buFont typeface="Arial" panose="020B0604020202020204" pitchFamily="34" charset="0"/>
+              <a:buChar char="•"/>
+            </a:pPr>
+            <a:r>
+              <a:rPr sz="1400" dirty="0">
                 <a:solidFill>
                   <a:srgbClr val="334155"/>
                 </a:solidFill>
@@ -17478,13 +17630,15 @@
             </a:r>
           </a:p>
           <a:p>
-            <a:pPr>
+            <a:pPr marL="285750" indent="-285750">
               <a:lnSpc>
                 <a:spcPct val="115000"/>
               </a:lnSpc>
-            </a:pPr>
-            <a:r>
-              <a:rPr sz="1400">
+              <a:buFont typeface="Arial" panose="020B0604020202020204" pitchFamily="34" charset="0"/>
+              <a:buChar char="•"/>
+            </a:pPr>
+            <a:r>
+              <a:rPr sz="1400" dirty="0">
                 <a:solidFill>
                   <a:srgbClr val="334155"/>
                 </a:solidFill>
@@ -17494,13 +17648,15 @@
             </a:r>
           </a:p>
           <a:p>
-            <a:pPr>
+            <a:pPr marL="285750" indent="-285750">
               <a:lnSpc>
                 <a:spcPct val="115000"/>
               </a:lnSpc>
-            </a:pPr>
-            <a:r>
-              <a:rPr sz="1400">
+              <a:buFont typeface="Arial" panose="020B0604020202020204" pitchFamily="34" charset="0"/>
+              <a:buChar char="•"/>
+            </a:pPr>
+            <a:r>
+              <a:rPr sz="1400" dirty="0">
                 <a:solidFill>
                   <a:srgbClr val="334155"/>
                 </a:solidFill>
@@ -17510,13 +17666,15 @@
             </a:r>
           </a:p>
           <a:p>
-            <a:pPr>
+            <a:pPr marL="285750" indent="-285750">
               <a:lnSpc>
                 <a:spcPct val="115000"/>
               </a:lnSpc>
-            </a:pPr>
-            <a:r>
-              <a:rPr sz="1400">
+              <a:buFont typeface="Arial" panose="020B0604020202020204" pitchFamily="34" charset="0"/>
+              <a:buChar char="•"/>
+            </a:pPr>
+            <a:r>
+              <a:rPr sz="1400" dirty="0">
                 <a:solidFill>
                   <a:srgbClr val="334155"/>
                 </a:solidFill>
@@ -17629,13 +17787,15 @@
           </a:bodyPr>
           <a:lstStyle/>
           <a:p>
-            <a:pPr>
+            <a:pPr marL="285750" indent="-285750">
               <a:lnSpc>
                 <a:spcPct val="115000"/>
               </a:lnSpc>
-            </a:pPr>
-            <a:r>
-              <a:rPr sz="1400">
+              <a:buFont typeface="Arial" panose="020B0604020202020204" pitchFamily="34" charset="0"/>
+              <a:buChar char="•"/>
+            </a:pPr>
+            <a:r>
+              <a:rPr sz="1400" dirty="0">
                 <a:solidFill>
                   <a:srgbClr val="334155"/>
                 </a:solidFill>
@@ -17645,13 +17805,15 @@
             </a:r>
           </a:p>
           <a:p>
-            <a:pPr>
+            <a:pPr marL="285750" indent="-285750">
               <a:lnSpc>
                 <a:spcPct val="115000"/>
               </a:lnSpc>
-            </a:pPr>
-            <a:r>
-              <a:rPr sz="1400">
+              <a:buFont typeface="Arial" panose="020B0604020202020204" pitchFamily="34" charset="0"/>
+              <a:buChar char="•"/>
+            </a:pPr>
+            <a:r>
+              <a:rPr sz="1400" dirty="0">
                 <a:solidFill>
                   <a:srgbClr val="334155"/>
                 </a:solidFill>
@@ -17661,13 +17823,15 @@
             </a:r>
           </a:p>
           <a:p>
-            <a:pPr>
+            <a:pPr marL="285750" indent="-285750">
               <a:lnSpc>
                 <a:spcPct val="115000"/>
               </a:lnSpc>
-            </a:pPr>
-            <a:r>
-              <a:rPr sz="1400">
+              <a:buFont typeface="Arial" panose="020B0604020202020204" pitchFamily="34" charset="0"/>
+              <a:buChar char="•"/>
+            </a:pPr>
+            <a:r>
+              <a:rPr sz="1400" dirty="0">
                 <a:solidFill>
                   <a:srgbClr val="334155"/>
                 </a:solidFill>
@@ -17677,13 +17841,15 @@
             </a:r>
           </a:p>
           <a:p>
-            <a:pPr>
+            <a:pPr marL="285750" indent="-285750">
               <a:lnSpc>
                 <a:spcPct val="115000"/>
               </a:lnSpc>
-            </a:pPr>
-            <a:r>
-              <a:rPr sz="1400">
+              <a:buFont typeface="Arial" panose="020B0604020202020204" pitchFamily="34" charset="0"/>
+              <a:buChar char="•"/>
+            </a:pPr>
+            <a:r>
+              <a:rPr sz="1400" dirty="0">
                 <a:solidFill>
                   <a:srgbClr val="334155"/>
                 </a:solidFill>
@@ -19625,13 +19791,22 @@
           <a:p>
             <a:pPr algn="l"/>
             <a:r>
+              <a:rPr lang="en-US" sz="2000" b="1" i="0" dirty="0">
+                <a:solidFill>
+                  <a:srgbClr val="003865"/>
+                </a:solidFill>
+                <a:latin typeface="Calibri"/>
+              </a:rPr>
+              <a:t>Demo</a:t>
+            </a:r>
+            <a:r>
               <a:rPr sz="2000" b="1" i="0" dirty="0">
                 <a:solidFill>
                   <a:srgbClr val="003865"/>
                 </a:solidFill>
                 <a:latin typeface="Calibri"/>
               </a:rPr>
-              <a:t>Live Code — </a:t>
+              <a:t> — </a:t>
             </a:r>
             <a:r>
               <a:rPr sz="2000" b="1" i="0" dirty="0" err="1">
@@ -19684,7 +19859,7 @@
                 </a:solidFill>
                 <a:latin typeface="Calibri"/>
               </a:rPr>
-              <a:t>Home · Courses · Profile in 30 minutes</a:t>
+              <a:t>Home · Courses · Profile </a:t>
             </a:r>
           </a:p>
         </p:txBody>
@@ -25322,10 +25497,12 @@
           </a:bodyPr>
           <a:lstStyle/>
           <a:p>
-            <a:pPr>
+            <a:pPr marL="171450" indent="-171450">
               <a:lnSpc>
                 <a:spcPct val="115000"/>
               </a:lnSpc>
+              <a:buFont typeface="Arial" panose="020B0604020202020204" pitchFamily="34" charset="0"/>
+              <a:buChar char="•"/>
             </a:pPr>
             <a:r>
               <a:rPr sz="1200" dirty="0" err="1">
@@ -25347,10 +25524,12 @@
             </a:r>
           </a:p>
           <a:p>
-            <a:pPr>
+            <a:pPr marL="171450" indent="-171450">
               <a:lnSpc>
                 <a:spcPct val="115000"/>
               </a:lnSpc>
+              <a:buFont typeface="Arial" panose="020B0604020202020204" pitchFamily="34" charset="0"/>
+              <a:buChar char="•"/>
             </a:pPr>
             <a:r>
               <a:rPr sz="1200" dirty="0" err="1">
@@ -25387,10 +25566,12 @@
             </a:endParaRPr>
           </a:p>
           <a:p>
-            <a:pPr>
+            <a:pPr marL="171450" indent="-171450">
               <a:lnSpc>
                 <a:spcPct val="115000"/>
               </a:lnSpc>
+              <a:buFont typeface="Arial" panose="020B0604020202020204" pitchFamily="34" charset="0"/>
+              <a:buChar char="•"/>
             </a:pPr>
             <a:r>
               <a:rPr sz="1200" dirty="0">
@@ -25521,10 +25702,12 @@
           </a:bodyPr>
           <a:lstStyle/>
           <a:p>
-            <a:pPr>
+            <a:pPr marL="171450" indent="-171450">
               <a:lnSpc>
                 <a:spcPct val="115000"/>
               </a:lnSpc>
+              <a:buFont typeface="Arial" panose="020B0604020202020204" pitchFamily="34" charset="0"/>
+              <a:buChar char="•"/>
             </a:pPr>
             <a:r>
               <a:rPr sz="1200" dirty="0">
@@ -25537,10 +25720,12 @@
             </a:r>
           </a:p>
           <a:p>
-            <a:pPr>
+            <a:pPr marL="171450" indent="-171450">
               <a:lnSpc>
                 <a:spcPct val="115000"/>
               </a:lnSpc>
+              <a:buFont typeface="Arial" panose="020B0604020202020204" pitchFamily="34" charset="0"/>
+              <a:buChar char="•"/>
             </a:pPr>
             <a:r>
               <a:rPr sz="1200" dirty="0">
@@ -25553,10 +25738,12 @@
             </a:r>
           </a:p>
           <a:p>
-            <a:pPr>
+            <a:pPr marL="171450" indent="-171450">
               <a:lnSpc>
                 <a:spcPct val="115000"/>
               </a:lnSpc>
+              <a:buFont typeface="Arial" panose="020B0604020202020204" pitchFamily="34" charset="0"/>
+              <a:buChar char="•"/>
             </a:pPr>
             <a:r>
               <a:rPr sz="1200" dirty="0">
@@ -25658,8 +25845,8 @@
         </p:nvSpPr>
         <p:spPr>
           <a:xfrm>
-            <a:off x="5190566" y="3540339"/>
-            <a:ext cx="3587674" cy="1095556"/>
+            <a:off x="5111694" y="3522291"/>
+            <a:ext cx="3657600" cy="1307922"/>
           </a:xfrm>
           <a:prstGeom prst="rect">
             <a:avLst/>
@@ -25672,29 +25859,51 @@
           </a:bodyPr>
           <a:lstStyle/>
           <a:p>
-            <a:pPr>
+            <a:pPr marL="171450" indent="-171450">
               <a:lnSpc>
                 <a:spcPct val="115000"/>
               </a:lnSpc>
-            </a:pPr>
-            <a:r>
-              <a:rPr sz="1200">
+              <a:buFont typeface="Arial" panose="020B0604020202020204" pitchFamily="34" charset="0"/>
+              <a:buChar char="•"/>
+            </a:pPr>
+            <a:r>
+              <a:rPr sz="1200" dirty="0">
                 <a:solidFill>
                   <a:srgbClr val="334155"/>
                 </a:solidFill>
                 <a:latin typeface="Calibri"/>
               </a:rPr>
-              <a:t>Visit icons.expo.fyi  — full searchable catalog.</a:t>
-            </a:r>
-          </a:p>
-          <a:p>
-            <a:pPr>
+              <a:t>Visit </a:t>
+            </a:r>
+            <a:r>
+              <a:rPr sz="1200" dirty="0" err="1">
+                <a:solidFill>
+                  <a:srgbClr val="334155"/>
+                </a:solidFill>
+                <a:latin typeface="Calibri"/>
+              </a:rPr>
+              <a:t>icons.expo.fyi</a:t>
+            </a:r>
+            <a:r>
+              <a:rPr sz="1200" dirty="0">
+                <a:solidFill>
+                  <a:srgbClr val="334155"/>
+                </a:solidFill>
+                <a:latin typeface="Calibri"/>
+              </a:rPr>
+              <a:t>  — full searchable catalog.</a:t>
+            </a:r>
+          </a:p>
+          <a:p>
+            <a:pPr marL="171450" indent="-171450">
               <a:lnSpc>
                 <a:spcPct val="115000"/>
               </a:lnSpc>
-            </a:pPr>
-            <a:r>
-              <a:rPr sz="1200">
+              <a:buFont typeface="Arial" panose="020B0604020202020204" pitchFamily="34" charset="0"/>
+              <a:buChar char="•"/>
+            </a:pPr>
+            <a:r>
+              <a:rPr sz="1200" dirty="0">
                 <a:solidFill>
                   <a:srgbClr val="334155"/>
                 </a:solidFill>
@@ -25704,13 +25913,15 @@
             </a:r>
           </a:p>
           <a:p>
-            <a:pPr>
+            <a:pPr marL="171450" indent="-171450">
               <a:lnSpc>
                 <a:spcPct val="115000"/>
               </a:lnSpc>
-            </a:pPr>
-            <a:r>
-              <a:rPr sz="1200">
+              <a:buFont typeface="Arial" panose="020B0604020202020204" pitchFamily="34" charset="0"/>
+              <a:buChar char="•"/>
+            </a:pPr>
+            <a:r>
+              <a:rPr sz="1200" dirty="0">
                 <a:solidFill>
                   <a:srgbClr val="334155"/>
                 </a:solidFill>
@@ -25720,13 +25931,15 @@
             </a:r>
           </a:p>
           <a:p>
-            <a:pPr>
+            <a:pPr marL="171450" indent="-171450">
               <a:lnSpc>
                 <a:spcPct val="115000"/>
               </a:lnSpc>
-            </a:pPr>
-            <a:r>
-              <a:rPr sz="1200">
+              <a:buFont typeface="Arial" panose="020B0604020202020204" pitchFamily="34" charset="0"/>
+              <a:buChar char="•"/>
+            </a:pPr>
+            <a:r>
+              <a:rPr sz="1200" dirty="0">
                 <a:solidFill>
                   <a:srgbClr val="334155"/>
                 </a:solidFill>
@@ -25736,19 +25949,39 @@
             </a:r>
           </a:p>
           <a:p>
-            <a:pPr>
+            <a:pPr marL="171450" indent="-171450">
               <a:lnSpc>
                 <a:spcPct val="115000"/>
               </a:lnSpc>
-            </a:pPr>
-            <a:r>
-              <a:rPr sz="1200">
+              <a:buFont typeface="Arial" panose="020B0604020202020204" pitchFamily="34" charset="0"/>
+              <a:buChar char="•"/>
+            </a:pPr>
+            <a:r>
+              <a:rPr sz="1200" dirty="0">
                 <a:solidFill>
                   <a:srgbClr val="334155"/>
                 </a:solidFill>
                 <a:latin typeface="Calibri"/>
               </a:rPr>
-              <a:t>Use size &amp; color from tabBarIcon props for free theming.</a:t>
+              <a:t>Use size &amp; color from </a:t>
+            </a:r>
+            <a:r>
+              <a:rPr sz="1200" dirty="0" err="1">
+                <a:solidFill>
+                  <a:srgbClr val="334155"/>
+                </a:solidFill>
+                <a:latin typeface="Calibri"/>
+              </a:rPr>
+              <a:t>tabBarIcon</a:t>
+            </a:r>
+            <a:r>
+              <a:rPr sz="1200" dirty="0">
+                <a:solidFill>
+                  <a:srgbClr val="334155"/>
+                </a:solidFill>
+                <a:latin typeface="Calibri"/>
+              </a:rPr>
+              <a:t> props for free theming.</a:t>
             </a:r>
           </a:p>
         </p:txBody>
@@ -26881,8 +27114,8 @@
         </p:nvSpPr>
         <p:spPr>
           <a:xfrm>
-            <a:off x="5577840" y="1607554"/>
-            <a:ext cx="3200399" cy="670825"/>
+            <a:off x="5577840" y="1567094"/>
+            <a:ext cx="3200399" cy="883190"/>
           </a:xfrm>
           <a:prstGeom prst="rect">
             <a:avLst/>
@@ -26895,10 +27128,12 @@
           </a:bodyPr>
           <a:lstStyle/>
           <a:p>
-            <a:pPr>
+            <a:pPr marL="171450" indent="-171450">
               <a:lnSpc>
                 <a:spcPct val="115000"/>
               </a:lnSpc>
+              <a:buFont typeface="Arial" panose="020B0604020202020204" pitchFamily="34" charset="0"/>
+              <a:buChar char="•"/>
             </a:pPr>
             <a:r>
               <a:rPr sz="1200" dirty="0" err="1">
@@ -26920,10 +27155,12 @@
             </a:r>
           </a:p>
           <a:p>
-            <a:pPr>
+            <a:pPr marL="171450" indent="-171450">
               <a:lnSpc>
                 <a:spcPct val="115000"/>
               </a:lnSpc>
+              <a:buFont typeface="Arial" panose="020B0604020202020204" pitchFamily="34" charset="0"/>
+              <a:buChar char="•"/>
             </a:pPr>
             <a:r>
               <a:rPr sz="1200" dirty="0" err="1">
@@ -26945,10 +27182,12 @@
             </a:r>
           </a:p>
           <a:p>
-            <a:pPr>
+            <a:pPr marL="171450" indent="-171450">
               <a:lnSpc>
                 <a:spcPct val="115000"/>
               </a:lnSpc>
+              <a:buFont typeface="Arial" panose="020B0604020202020204" pitchFamily="34" charset="0"/>
+              <a:buChar char="•"/>
             </a:pPr>
             <a:r>
               <a:rPr sz="1200" dirty="0" err="1">
@@ -27077,8 +27316,8 @@
         </p:nvSpPr>
         <p:spPr>
           <a:xfrm>
-            <a:off x="5577840" y="2887714"/>
-            <a:ext cx="3200399" cy="883190"/>
+            <a:off x="5545472" y="2839162"/>
+            <a:ext cx="3383280" cy="883190"/>
           </a:xfrm>
           <a:prstGeom prst="rect">
             <a:avLst/>
@@ -27091,29 +27330,42 @@
           </a:bodyPr>
           <a:lstStyle/>
           <a:p>
-            <a:pPr>
+            <a:pPr marL="171450" indent="-171450">
               <a:lnSpc>
                 <a:spcPct val="115000"/>
               </a:lnSpc>
-            </a:pPr>
-            <a:r>
-              <a:rPr sz="1200">
+              <a:buFont typeface="Arial" panose="020B0604020202020204" pitchFamily="34" charset="0"/>
+              <a:buChar char="•"/>
+            </a:pPr>
+            <a:r>
+              <a:rPr sz="1200" dirty="0" err="1">
                 <a:solidFill>
                   <a:srgbClr val="334155"/>
                 </a:solidFill>
                 <a:latin typeface="Calibri"/>
               </a:rPr>
-              <a:t>tabBarStyle: { display: 'none' }</a:t>
-            </a:r>
-          </a:p>
-          <a:p>
-            <a:pPr>
+              <a:t>tabBarStyle</a:t>
+            </a:r>
+            <a:r>
+              <a:rPr sz="1200" dirty="0">
+                <a:solidFill>
+                  <a:srgbClr val="334155"/>
+                </a:solidFill>
+                <a:latin typeface="Calibri"/>
+              </a:rPr>
+              <a:t>: { display: 'none' }</a:t>
+            </a:r>
+          </a:p>
+          <a:p>
+            <a:pPr marL="171450" indent="-171450">
               <a:lnSpc>
                 <a:spcPct val="115000"/>
               </a:lnSpc>
-            </a:pPr>
-            <a:r>
-              <a:rPr sz="1200">
+              <a:buFont typeface="Arial" panose="020B0604020202020204" pitchFamily="34" charset="0"/>
+              <a:buChar char="•"/>
+            </a:pPr>
+            <a:r>
+              <a:rPr sz="1200" dirty="0">
                 <a:solidFill>
                   <a:srgbClr val="334155"/>
                 </a:solidFill>
@@ -27123,19 +27375,39 @@
             </a:r>
           </a:p>
           <a:p>
-            <a:pPr>
+            <a:pPr marL="171450" indent="-171450">
               <a:lnSpc>
                 <a:spcPct val="115000"/>
               </a:lnSpc>
-            </a:pPr>
-            <a:r>
-              <a:rPr sz="1200">
+              <a:buFont typeface="Arial" panose="020B0604020202020204" pitchFamily="34" charset="0"/>
+              <a:buChar char="•"/>
+            </a:pPr>
+            <a:r>
+              <a:rPr sz="1200" dirty="0">
                 <a:solidFill>
                   <a:srgbClr val="334155"/>
                 </a:solidFill>
                 <a:latin typeface="Calibri"/>
               </a:rPr>
-              <a:t>Set it per-screen with options on that &lt;Tabs.Screen&gt;.</a:t>
+              <a:t>Set it per-screen with options on that &lt;</a:t>
+            </a:r>
+            <a:r>
+              <a:rPr sz="1200" dirty="0" err="1">
+                <a:solidFill>
+                  <a:srgbClr val="334155"/>
+                </a:solidFill>
+                <a:latin typeface="Calibri"/>
+              </a:rPr>
+              <a:t>Tabs.Screen</a:t>
+            </a:r>
+            <a:r>
+              <a:rPr sz="1200" dirty="0">
+                <a:solidFill>
+                  <a:srgbClr val="334155"/>
+                </a:solidFill>
+                <a:latin typeface="Calibri"/>
+              </a:rPr>
+              <a:t>&gt;.</a:t>
             </a:r>
           </a:p>
         </p:txBody>
@@ -27242,29 +27514,60 @@
           </a:bodyPr>
           <a:lstStyle/>
           <a:p>
-            <a:pPr>
+            <a:pPr marL="171450" indent="-171450">
               <a:lnSpc>
                 <a:spcPct val="115000"/>
               </a:lnSpc>
-            </a:pPr>
-            <a:r>
-              <a:rPr sz="1200">
+              <a:buFont typeface="Arial" panose="020B0604020202020204" pitchFamily="34" charset="0"/>
+              <a:buChar char="•"/>
+            </a:pPr>
+            <a:r>
+              <a:rPr sz="1200" dirty="0" err="1">
                 <a:solidFill>
                   <a:srgbClr val="334155"/>
                 </a:solidFill>
                 <a:latin typeface="Calibri"/>
               </a:rPr>
-              <a:t>href: null on the &lt;Tabs.Screen&gt;.</a:t>
-            </a:r>
-          </a:p>
-          <a:p>
-            <a:pPr>
+              <a:t>href</a:t>
+            </a:r>
+            <a:r>
+              <a:rPr sz="1200" dirty="0">
+                <a:solidFill>
+                  <a:srgbClr val="334155"/>
+                </a:solidFill>
+                <a:latin typeface="Calibri"/>
+              </a:rPr>
+              <a:t>: null on the &lt;</a:t>
+            </a:r>
+            <a:r>
+              <a:rPr sz="1200" dirty="0" err="1">
+                <a:solidFill>
+                  <a:srgbClr val="334155"/>
+                </a:solidFill>
+                <a:latin typeface="Calibri"/>
+              </a:rPr>
+              <a:t>Tabs.Screen</a:t>
+            </a:r>
+            <a:r>
+              <a:rPr sz="1200" dirty="0">
+                <a:solidFill>
+                  <a:srgbClr val="334155"/>
+                </a:solidFill>
+                <a:latin typeface="Calibri"/>
+              </a:rPr>
+              <a:t>&gt;.</a:t>
+            </a:r>
+          </a:p>
+          <a:p>
+            <a:pPr marL="171450" indent="-171450">
               <a:lnSpc>
                 <a:spcPct val="115000"/>
               </a:lnSpc>
-            </a:pPr>
-            <a:r>
-              <a:rPr sz="1200">
+              <a:buFont typeface="Arial" panose="020B0604020202020204" pitchFamily="34" charset="0"/>
+              <a:buChar char="•"/>
+            </a:pPr>
+            <a:r>
+              <a:rPr sz="1200" dirty="0">
                 <a:solidFill>
                   <a:srgbClr val="334155"/>
                 </a:solidFill>
@@ -27274,13 +27577,15 @@
             </a:r>
           </a:p>
           <a:p>
-            <a:pPr>
+            <a:pPr marL="171450" indent="-171450">
               <a:lnSpc>
                 <a:spcPct val="115000"/>
               </a:lnSpc>
-            </a:pPr>
-            <a:r>
-              <a:rPr sz="1200">
+              <a:buFont typeface="Arial" panose="020B0604020202020204" pitchFamily="34" charset="0"/>
+              <a:buChar char="•"/>
+            </a:pPr>
+            <a:r>
+              <a:rPr sz="1200" dirty="0">
                 <a:solidFill>
                   <a:srgbClr val="334155"/>
                 </a:solidFill>

--- a/Unit 4/Tab_Navigation_Updated.pptx
+++ b/Unit 4/Tab_Navigation_Updated.pptx
@@ -227,7 +227,7 @@
           <a:p>
             <a:fld id="{AC356047-9B32-4B44-A900-2428BFBDDF8F}" type="datetimeFigureOut">
               <a:rPr lang="en-US" smtClean="0"/>
-              <a:t>9/15/2026</a:t>
+              <a:t>9/25/2026</a:t>
             </a:fld>
             <a:endParaRPr lang="en-US"/>
           </a:p>
@@ -2287,7 +2287,7 @@
           <a:p>
             <a:fld id="{5BCAD085-E8A6-8845-BD4E-CB4CCA059FC4}" type="datetimeFigureOut">
               <a:rPr lang="en-US" smtClean="0"/>
-              <a:t>9/15/2026</a:t>
+              <a:t>9/25/2026</a:t>
             </a:fld>
             <a:endParaRPr lang="en-US"/>
           </a:p>
@@ -2455,7 +2455,7 @@
           <a:p>
             <a:fld id="{5BCAD085-E8A6-8845-BD4E-CB4CCA059FC4}" type="datetimeFigureOut">
               <a:rPr lang="en-US" smtClean="0"/>
-              <a:t>9/15/2026</a:t>
+              <a:t>9/25/2026</a:t>
             </a:fld>
             <a:endParaRPr lang="en-US"/>
           </a:p>
@@ -2633,7 +2633,7 @@
           <a:p>
             <a:fld id="{5BCAD085-E8A6-8845-BD4E-CB4CCA059FC4}" type="datetimeFigureOut">
               <a:rPr lang="en-US" smtClean="0"/>
-              <a:t>9/15/2026</a:t>
+              <a:t>9/25/2026</a:t>
             </a:fld>
             <a:endParaRPr lang="en-US"/>
           </a:p>
@@ -2801,7 +2801,7 @@
           <a:p>
             <a:fld id="{5BCAD085-E8A6-8845-BD4E-CB4CCA059FC4}" type="datetimeFigureOut">
               <a:rPr lang="en-US" smtClean="0"/>
-              <a:t>9/15/2026</a:t>
+              <a:t>9/25/2026</a:t>
             </a:fld>
             <a:endParaRPr lang="en-US"/>
           </a:p>
@@ -3046,7 +3046,7 @@
           <a:p>
             <a:fld id="{5BCAD085-E8A6-8845-BD4E-CB4CCA059FC4}" type="datetimeFigureOut">
               <a:rPr lang="en-US" smtClean="0"/>
-              <a:t>9/15/2026</a:t>
+              <a:t>9/25/2026</a:t>
             </a:fld>
             <a:endParaRPr lang="en-US"/>
           </a:p>
@@ -3331,7 +3331,7 @@
           <a:p>
             <a:fld id="{5BCAD085-E8A6-8845-BD4E-CB4CCA059FC4}" type="datetimeFigureOut">
               <a:rPr lang="en-US" smtClean="0"/>
-              <a:t>9/15/2026</a:t>
+              <a:t>9/25/2026</a:t>
             </a:fld>
             <a:endParaRPr lang="en-US"/>
           </a:p>
@@ -3750,7 +3750,7 @@
           <a:p>
             <a:fld id="{5BCAD085-E8A6-8845-BD4E-CB4CCA059FC4}" type="datetimeFigureOut">
               <a:rPr lang="en-US" smtClean="0"/>
-              <a:t>9/15/2026</a:t>
+              <a:t>9/25/2026</a:t>
             </a:fld>
             <a:endParaRPr lang="en-US"/>
           </a:p>
@@ -3867,7 +3867,7 @@
           <a:p>
             <a:fld id="{5BCAD085-E8A6-8845-BD4E-CB4CCA059FC4}" type="datetimeFigureOut">
               <a:rPr lang="en-US" smtClean="0"/>
-              <a:t>9/15/2026</a:t>
+              <a:t>9/25/2026</a:t>
             </a:fld>
             <a:endParaRPr lang="en-US"/>
           </a:p>
@@ -3962,7 +3962,7 @@
           <a:p>
             <a:fld id="{5BCAD085-E8A6-8845-BD4E-CB4CCA059FC4}" type="datetimeFigureOut">
               <a:rPr lang="en-US" smtClean="0"/>
-              <a:t>9/15/2026</a:t>
+              <a:t>9/25/2026</a:t>
             </a:fld>
             <a:endParaRPr lang="en-US"/>
           </a:p>
@@ -4237,7 +4237,7 @@
           <a:p>
             <a:fld id="{5BCAD085-E8A6-8845-BD4E-CB4CCA059FC4}" type="datetimeFigureOut">
               <a:rPr lang="en-US" smtClean="0"/>
-              <a:t>9/15/2026</a:t>
+              <a:t>9/25/2026</a:t>
             </a:fld>
             <a:endParaRPr lang="en-US"/>
           </a:p>
@@ -4489,7 +4489,7 @@
           <a:p>
             <a:fld id="{5BCAD085-E8A6-8845-BD4E-CB4CCA059FC4}" type="datetimeFigureOut">
               <a:rPr lang="en-US" smtClean="0"/>
-              <a:t>9/15/2026</a:t>
+              <a:t>9/25/2026</a:t>
             </a:fld>
             <a:endParaRPr lang="en-US"/>
           </a:p>
@@ -4700,7 +4700,7 @@
           <a:p>
             <a:fld id="{5BCAD085-E8A6-8845-BD4E-CB4CCA059FC4}" type="datetimeFigureOut">
               <a:rPr lang="en-US" smtClean="0"/>
-              <a:t>9/15/2026</a:t>
+              <a:t>9/25/2026</a:t>
             </a:fld>
             <a:endParaRPr lang="en-US"/>
           </a:p>
@@ -19948,7 +19948,7 @@
                 </a:solidFill>
                 <a:latin typeface="Calibri"/>
               </a:rPr>
-              <a:t>Class Activity</a:t>
+              <a:t>Activity</a:t>
             </a:r>
           </a:p>
         </p:txBody>
